--- a/leslie-linkedin/v.pptx
+++ b/leslie-linkedin/v.pptx
@@ -22154,7 +22154,7 @@
                 </a:solidFill>
                 <a:latin typeface="Funnel Display"/>
               </a:rPr>
-              <a:t>« Celle qui a fait grandir Wave et Bolt, et qui aide aujourd'hui l'Afrique francophone à construire ses propres champions, en disant les choses comme elles sont. »</a:t>
+              <a:t>« Passée par BuuPass, Bolt et Wave, celle qui aide aujourd'hui l'Afrique francophone à construire ses propres champions, en disant les choses comme elles sont. »</a:t>
             </a:r>
           </a:p>
         </p:txBody>
@@ -40273,7 +40273,7 @@
                 </a:solidFill>
                 <a:latin typeface="Work Sans"/>
               </a:rPr>
-              <a:t>Profils LinkedIn de six dirigeantes choisies par Fatima, publications du 1er janvier au 24 octobre 2026. Repère : les 89 posts de la page Mstudio.</a:t>
+              <a:t>Profils LinkedIn de six dirigeantes choisies par nos soins, publications du 1er janvier au 24 octobre 2026. Repère : les 89 posts de la page Mstudio.</a:t>
             </a:r>
           </a:p>
           <a:p>
@@ -45091,8 +45091,8 @@
         </p:nvSpPr>
         <p:spPr>
           <a:xfrm>
-            <a:off x="6309360" y="6035040"/>
-            <a:ext cx="5330952" cy="274320"/>
+            <a:off x="6309360" y="5897880"/>
+            <a:ext cx="5330952" cy="365760"/>
           </a:xfrm>
           <a:prstGeom prst="rect">
             <a:avLst/>
